--- a/output.pptx
+++ b/output.pptx
@@ -3084,7 +3084,7 @@
     <p:bg>
       <p:bgPr>
         <a:solidFill>
-          <a:srgbClr val="F3F4F6"/>
+          <a:srgbClr val="F4F5F7"/>
         </a:solidFill>
         <a:effectLst/>
       </p:bgPr>
@@ -3111,7 +3111,7 @@
             <a:avLst/>
           </a:prstGeom>
           <a:solidFill>
-            <a:srgbClr val="F3F4F6"/>
+            <a:srgbClr val="F4F5F7"/>
           </a:solidFill>
           <a:ln>
             <a:noFill/>
@@ -3141,7 +3141,7 @@
       </p:sp>
       <p:pic>
         <p:nvPicPr>
-          <p:cNvPr id="3" name="Picture 2" descr="tmprm49uvui.png"/>
+          <p:cNvPr id="3" name="Picture 2" descr="tmpodf7drrs.png"/>
           <p:cNvPicPr>
             <a:picLocks noChangeAspect="1"/>
           </p:cNvPicPr>
@@ -3155,558 +3155,17 @@
         </p:blipFill>
         <p:spPr>
           <a:xfrm>
-            <a:off x="304792" y="685800"/>
-            <a:ext cx="5486263" cy="5486400"/>
+            <a:off x="0" y="0"/>
+            <a:ext cx="12191695" cy="6858000"/>
           </a:xfrm>
           <a:prstGeom prst="rect">
             <a:avLst/>
           </a:prstGeom>
         </p:spPr>
       </p:pic>
-      <p:sp>
-        <p:nvSpPr>
-          <p:cNvPr id="4" name="TextBox 3"/>
-          <p:cNvSpPr txBox="1"/>
-          <p:nvPr/>
-        </p:nvSpPr>
-        <p:spPr>
-          <a:xfrm>
-            <a:off x="1824182" y="2304288"/>
-            <a:ext cx="2447483" cy="2249424"/>
-          </a:xfrm>
-          <a:prstGeom prst="rect">
-            <a:avLst/>
-          </a:prstGeom>
-          <a:noFill/>
-        </p:spPr>
-        <p:txBody>
-          <a:bodyPr wrap="square" lIns="0" rIns="0" tIns="0" bIns="0" anchor="ctr">
-            <a:noAutofit/>
-          </a:bodyPr>
-          <a:lstStyle/>
-          <a:p>
-            <a:pPr algn="ctr">
-              <a:lnSpc>
-                <a:spcPct val="105000"/>
-              </a:lnSpc>
-              <a:spcBef>
-                <a:spcPts val="0"/>
-              </a:spcBef>
-              <a:spcAft>
-                <a:spcPts val="0"/>
-              </a:spcAft>
-              <a:defRPr sz="1700" b="1" i="0">
-                <a:solidFill>
-                  <a:srgbClr val="000000"/>
-                </a:solidFill>
-                <a:latin typeface="Arial"/>
-              </a:defRPr>
-            </a:pPr>
-            <a:r>
-              <a:t>AGILE AND THE CUSTOMER JOURNEY AGILE AND THE CUSTOMER JOURNEY</a:t>
-            </a:r>
-          </a:p>
-        </p:txBody>
-      </p:sp>
-      <p:cxnSp>
-        <p:nvCxnSpPr>
-          <p:cNvPr id="5" name="Connector 4"/>
-          <p:cNvCxnSpPr/>
-          <p:nvPr/>
-        </p:nvCxnSpPr>
-        <p:spPr>
-          <a:xfrm flipV="1">
-            <a:off x="3866748" y="1143000"/>
-            <a:ext cx="2610090" cy="309143"/>
-          </a:xfrm>
-          <a:prstGeom prst="line">
-            <a:avLst/>
-          </a:prstGeom>
-          <a:ln w="20320">
-            <a:solidFill>
-              <a:srgbClr val="D6DAE0"/>
-            </a:solidFill>
-          </a:ln>
-        </p:spPr>
-        <p:style>
-          <a:lnRef idx="2">
-            <a:schemeClr val="accent1"/>
-          </a:lnRef>
-          <a:fillRef idx="0">
-            <a:schemeClr val="accent1"/>
-          </a:fillRef>
-          <a:effectRef idx="1">
-            <a:schemeClr val="accent1"/>
-          </a:effectRef>
-          <a:fontRef idx="minor">
-            <a:schemeClr val="tx1"/>
-          </a:fontRef>
-        </p:style>
-      </p:cxnSp>
-      <p:sp>
-        <p:nvSpPr>
-          <p:cNvPr id="6" name="Oval 5"/>
-          <p:cNvSpPr/>
-          <p:nvPr/>
-        </p:nvSpPr>
-        <p:spPr>
-          <a:xfrm>
-            <a:off x="6431119" y="1097280"/>
-            <a:ext cx="91438" cy="91440"/>
-          </a:xfrm>
-          <a:prstGeom prst="ellipse">
-            <a:avLst/>
-          </a:prstGeom>
-          <a:solidFill>
-            <a:srgbClr val="FFC400"/>
-          </a:solidFill>
-          <a:ln w="25400">
-            <a:solidFill>
-              <a:srgbClr val="F3F4F6"/>
-            </a:solidFill>
-          </a:ln>
-        </p:spPr>
-        <p:style>
-          <a:lnRef idx="1">
-            <a:schemeClr val="accent1"/>
-          </a:lnRef>
-          <a:fillRef idx="3">
-            <a:schemeClr val="accent1"/>
-          </a:fillRef>
-          <a:effectRef idx="2">
-            <a:schemeClr val="accent1"/>
-          </a:effectRef>
-          <a:fontRef idx="minor">
-            <a:schemeClr val="lt1"/>
-          </a:fontRef>
-        </p:style>
-        <p:txBody>
-          <a:bodyPr rtlCol="0" anchor="ctr"/>
-          <a:lstStyle/>
-          <a:p>
-            <a:pPr algn="ctr"/>
-          </a:p>
-        </p:txBody>
-      </p:sp>
-      <p:cxnSp>
-        <p:nvCxnSpPr>
-          <p:cNvPr id="7" name="Connector 6"/>
-          <p:cNvCxnSpPr/>
-          <p:nvPr/>
-        </p:nvCxnSpPr>
-        <p:spPr>
-          <a:xfrm>
-            <a:off x="5024731" y="2610155"/>
-            <a:ext cx="1452107" cy="56845"/>
-          </a:xfrm>
-          <a:prstGeom prst="line">
-            <a:avLst/>
-          </a:prstGeom>
-          <a:ln w="20320">
-            <a:solidFill>
-              <a:srgbClr val="D6DAE0"/>
-            </a:solidFill>
-          </a:ln>
-        </p:spPr>
-        <p:style>
-          <a:lnRef idx="2">
-            <a:schemeClr val="accent1"/>
-          </a:lnRef>
-          <a:fillRef idx="0">
-            <a:schemeClr val="accent1"/>
-          </a:fillRef>
-          <a:effectRef idx="1">
-            <a:schemeClr val="accent1"/>
-          </a:effectRef>
-          <a:fontRef idx="minor">
-            <a:schemeClr val="tx1"/>
-          </a:fontRef>
-        </p:style>
-      </p:cxnSp>
-      <p:sp>
-        <p:nvSpPr>
-          <p:cNvPr id="8" name="Oval 7"/>
-          <p:cNvSpPr/>
-          <p:nvPr/>
-        </p:nvSpPr>
-        <p:spPr>
-          <a:xfrm>
-            <a:off x="6431119" y="2621280"/>
-            <a:ext cx="91438" cy="91440"/>
-          </a:xfrm>
-          <a:prstGeom prst="ellipse">
-            <a:avLst/>
-          </a:prstGeom>
-          <a:solidFill>
-            <a:srgbClr val="A6D24A"/>
-          </a:solidFill>
-          <a:ln w="25400">
-            <a:solidFill>
-              <a:srgbClr val="F3F4F6"/>
-            </a:solidFill>
-          </a:ln>
-        </p:spPr>
-        <p:style>
-          <a:lnRef idx="1">
-            <a:schemeClr val="accent1"/>
-          </a:lnRef>
-          <a:fillRef idx="3">
-            <a:schemeClr val="accent1"/>
-          </a:fillRef>
-          <a:effectRef idx="2">
-            <a:schemeClr val="accent1"/>
-          </a:effectRef>
-          <a:fontRef idx="minor">
-            <a:schemeClr val="lt1"/>
-          </a:fontRef>
-        </p:style>
-        <p:txBody>
-          <a:bodyPr rtlCol="0" anchor="ctr"/>
-          <a:lstStyle/>
-          <a:p>
-            <a:pPr algn="ctr"/>
-          </a:p>
-        </p:txBody>
-      </p:sp>
-      <p:cxnSp>
-        <p:nvCxnSpPr>
-          <p:cNvPr id="9" name="Connector 8"/>
-          <p:cNvCxnSpPr/>
-          <p:nvPr/>
-        </p:nvCxnSpPr>
-        <p:spPr>
-          <a:xfrm flipV="1">
-            <a:off x="5024731" y="4191000"/>
-            <a:ext cx="1452107" cy="56845"/>
-          </a:xfrm>
-          <a:prstGeom prst="line">
-            <a:avLst/>
-          </a:prstGeom>
-          <a:ln w="20320">
-            <a:solidFill>
-              <a:srgbClr val="D6DAE0"/>
-            </a:solidFill>
-          </a:ln>
-        </p:spPr>
-        <p:style>
-          <a:lnRef idx="2">
-            <a:schemeClr val="accent1"/>
-          </a:lnRef>
-          <a:fillRef idx="0">
-            <a:schemeClr val="accent1"/>
-          </a:fillRef>
-          <a:effectRef idx="1">
-            <a:schemeClr val="accent1"/>
-          </a:effectRef>
-          <a:fontRef idx="minor">
-            <a:schemeClr val="tx1"/>
-          </a:fontRef>
-        </p:style>
-      </p:cxnSp>
-      <p:sp>
-        <p:nvSpPr>
-          <p:cNvPr id="10" name="Oval 9"/>
-          <p:cNvSpPr/>
-          <p:nvPr/>
-        </p:nvSpPr>
-        <p:spPr>
-          <a:xfrm>
-            <a:off x="6431119" y="4145280"/>
-            <a:ext cx="91438" cy="91440"/>
-          </a:xfrm>
-          <a:prstGeom prst="ellipse">
-            <a:avLst/>
-          </a:prstGeom>
-          <a:solidFill>
-            <a:srgbClr val="12CDA5"/>
-          </a:solidFill>
-          <a:ln w="25400">
-            <a:solidFill>
-              <a:srgbClr val="F3F4F6"/>
-            </a:solidFill>
-          </a:ln>
-        </p:spPr>
-        <p:style>
-          <a:lnRef idx="1">
-            <a:schemeClr val="accent1"/>
-          </a:lnRef>
-          <a:fillRef idx="3">
-            <a:schemeClr val="accent1"/>
-          </a:fillRef>
-          <a:effectRef idx="2">
-            <a:schemeClr val="accent1"/>
-          </a:effectRef>
-          <a:fontRef idx="minor">
-            <a:schemeClr val="lt1"/>
-          </a:fontRef>
-        </p:style>
-        <p:txBody>
-          <a:bodyPr rtlCol="0" anchor="ctr"/>
-          <a:lstStyle/>
-          <a:p>
-            <a:pPr algn="ctr"/>
-          </a:p>
-        </p:txBody>
-      </p:sp>
-      <p:cxnSp>
-        <p:nvCxnSpPr>
-          <p:cNvPr id="11" name="Connector 10"/>
-          <p:cNvCxnSpPr/>
-          <p:nvPr/>
-        </p:nvCxnSpPr>
-        <p:spPr>
-          <a:xfrm>
-            <a:off x="3866748" y="5405857"/>
-            <a:ext cx="2610090" cy="309143"/>
-          </a:xfrm>
-          <a:prstGeom prst="line">
-            <a:avLst/>
-          </a:prstGeom>
-          <a:ln w="20320">
-            <a:solidFill>
-              <a:srgbClr val="D6DAE0"/>
-            </a:solidFill>
-          </a:ln>
-        </p:spPr>
-        <p:style>
-          <a:lnRef idx="2">
-            <a:schemeClr val="accent1"/>
-          </a:lnRef>
-          <a:fillRef idx="0">
-            <a:schemeClr val="accent1"/>
-          </a:fillRef>
-          <a:effectRef idx="1">
-            <a:schemeClr val="accent1"/>
-          </a:effectRef>
-          <a:fontRef idx="minor">
-            <a:schemeClr val="tx1"/>
-          </a:fontRef>
-        </p:style>
-      </p:cxnSp>
-      <p:sp>
-        <p:nvSpPr>
-          <p:cNvPr id="12" name="Oval 11"/>
-          <p:cNvSpPr/>
-          <p:nvPr/>
-        </p:nvSpPr>
-        <p:spPr>
-          <a:xfrm>
-            <a:off x="6431119" y="5669280"/>
-            <a:ext cx="91438" cy="91440"/>
-          </a:xfrm>
-          <a:prstGeom prst="ellipse">
-            <a:avLst/>
-          </a:prstGeom>
-          <a:solidFill>
-            <a:srgbClr val="18B7CF"/>
-          </a:solidFill>
-          <a:ln w="25400">
-            <a:solidFill>
-              <a:srgbClr val="F3F4F6"/>
-            </a:solidFill>
-          </a:ln>
-        </p:spPr>
-        <p:style>
-          <a:lnRef idx="1">
-            <a:schemeClr val="accent1"/>
-          </a:lnRef>
-          <a:fillRef idx="3">
-            <a:schemeClr val="accent1"/>
-          </a:fillRef>
-          <a:effectRef idx="2">
-            <a:schemeClr val="accent1"/>
-          </a:effectRef>
-          <a:fontRef idx="minor">
-            <a:schemeClr val="lt1"/>
-          </a:fontRef>
-        </p:style>
-        <p:txBody>
-          <a:bodyPr rtlCol="0" anchor="ctr"/>
-          <a:lstStyle/>
-          <a:p>
-            <a:pPr algn="ctr"/>
-          </a:p>
-        </p:txBody>
-      </p:sp>
-      <p:sp>
-        <p:nvSpPr>
-          <p:cNvPr id="13" name="Rounded Rectangle 12"/>
-          <p:cNvSpPr/>
-          <p:nvPr/>
-        </p:nvSpPr>
-        <p:spPr>
-          <a:xfrm>
-            <a:off x="6514937" y="739140"/>
-            <a:ext cx="4952876" cy="914400"/>
-          </a:xfrm>
-          <a:prstGeom prst="roundRect">
-            <a:avLst/>
-          </a:prstGeom>
-          <a:solidFill>
-            <a:srgbClr val="DDE1E6"/>
-          </a:solidFill>
-          <a:ln>
-            <a:noFill/>
-          </a:ln>
-        </p:spPr>
-        <p:style>
-          <a:lnRef idx="1">
-            <a:schemeClr val="accent1"/>
-          </a:lnRef>
-          <a:fillRef idx="3">
-            <a:schemeClr val="accent1"/>
-          </a:fillRef>
-          <a:effectRef idx="2">
-            <a:schemeClr val="accent1"/>
-          </a:effectRef>
-          <a:fontRef idx="minor">
-            <a:schemeClr val="lt1"/>
-          </a:fontRef>
-        </p:style>
-        <p:txBody>
-          <a:bodyPr rtlCol="0" anchor="ctr"/>
-          <a:lstStyle/>
-          <a:p>
-            <a:pPr algn="ctr"/>
-          </a:p>
-        </p:txBody>
-      </p:sp>
-      <p:sp>
-        <p:nvSpPr>
-          <p:cNvPr id="14" name="Rounded Rectangle 13"/>
-          <p:cNvSpPr/>
-          <p:nvPr/>
-        </p:nvSpPr>
-        <p:spPr>
-          <a:xfrm>
-            <a:off x="6476838" y="685800"/>
-            <a:ext cx="4952876" cy="914400"/>
-          </a:xfrm>
-          <a:prstGeom prst="roundRect">
-            <a:avLst/>
-          </a:prstGeom>
-          <a:solidFill>
-            <a:srgbClr val="FFFFFF"/>
-          </a:solidFill>
-          <a:ln w="12700">
-            <a:solidFill>
-              <a:srgbClr val="E2E5E9"/>
-            </a:solidFill>
-          </a:ln>
-        </p:spPr>
-        <p:style>
-          <a:lnRef idx="1">
-            <a:schemeClr val="accent1"/>
-          </a:lnRef>
-          <a:fillRef idx="3">
-            <a:schemeClr val="accent1"/>
-          </a:fillRef>
-          <a:effectRef idx="2">
-            <a:schemeClr val="accent1"/>
-          </a:effectRef>
-          <a:fontRef idx="minor">
-            <a:schemeClr val="lt1"/>
-          </a:fontRef>
-        </p:style>
-        <p:txBody>
-          <a:bodyPr rtlCol="0" anchor="ctr"/>
-          <a:lstStyle/>
-          <a:p>
-            <a:pPr algn="ctr"/>
-          </a:p>
-        </p:txBody>
-      </p:sp>
-      <p:sp>
-        <p:nvSpPr>
-          <p:cNvPr id="15" name="Rounded Rectangle 14"/>
-          <p:cNvSpPr/>
-          <p:nvPr/>
-        </p:nvSpPr>
-        <p:spPr>
-          <a:xfrm>
-            <a:off x="6476838" y="685800"/>
-            <a:ext cx="76198" cy="914400"/>
-          </a:xfrm>
-          <a:prstGeom prst="roundRect">
-            <a:avLst/>
-          </a:prstGeom>
-          <a:solidFill>
-            <a:srgbClr val="FFC400"/>
-          </a:solidFill>
-          <a:ln>
-            <a:noFill/>
-          </a:ln>
-        </p:spPr>
-        <p:style>
-          <a:lnRef idx="1">
-            <a:schemeClr val="accent1"/>
-          </a:lnRef>
-          <a:fillRef idx="3">
-            <a:schemeClr val="accent1"/>
-          </a:fillRef>
-          <a:effectRef idx="2">
-            <a:schemeClr val="accent1"/>
-          </a:effectRef>
-          <a:fontRef idx="minor">
-            <a:schemeClr val="lt1"/>
-          </a:fontRef>
-        </p:style>
-        <p:txBody>
-          <a:bodyPr rtlCol="0" anchor="ctr"/>
-          <a:lstStyle/>
-          <a:p>
-            <a:pPr algn="ctr"/>
-          </a:p>
-        </p:txBody>
-      </p:sp>
-      <p:sp>
-        <p:nvSpPr>
-          <p:cNvPr id="16" name="Oval 15"/>
-          <p:cNvSpPr/>
-          <p:nvPr/>
-        </p:nvSpPr>
-        <p:spPr>
-          <a:xfrm>
-            <a:off x="6690193" y="838200"/>
-            <a:ext cx="609585" cy="609600"/>
-          </a:xfrm>
-          <a:prstGeom prst="ellipse">
-            <a:avLst/>
-          </a:prstGeom>
-          <a:solidFill>
-            <a:srgbClr val="F8FAFC"/>
-          </a:solidFill>
-          <a:ln w="38100">
-            <a:solidFill>
-              <a:srgbClr val="FFC400"/>
-            </a:solidFill>
-          </a:ln>
-        </p:spPr>
-        <p:style>
-          <a:lnRef idx="1">
-            <a:schemeClr val="accent1"/>
-          </a:lnRef>
-          <a:fillRef idx="3">
-            <a:schemeClr val="accent1"/>
-          </a:fillRef>
-          <a:effectRef idx="2">
-            <a:schemeClr val="accent1"/>
-          </a:effectRef>
-          <a:fontRef idx="minor">
-            <a:schemeClr val="lt1"/>
-          </a:fontRef>
-        </p:style>
-        <p:txBody>
-          <a:bodyPr rtlCol="0" anchor="ctr"/>
-          <a:lstStyle/>
-          <a:p>
-            <a:pPr algn="ctr"/>
-          </a:p>
-        </p:txBody>
-      </p:sp>
       <p:pic>
         <p:nvPicPr>
-          <p:cNvPr id="17" name="Picture 16" descr="tmphlnv5n8k.png"/>
+          <p:cNvPr id="4" name="Picture 3" descr="tmpj3jx5hfh.png"/>
           <p:cNvPicPr>
             <a:picLocks noChangeAspect="1"/>
           </p:cNvPicPr>
@@ -3720,8 +3179,8 @@
         </p:blipFill>
         <p:spPr>
           <a:xfrm>
-            <a:off x="6824301" y="972312"/>
-            <a:ext cx="341367" cy="341376"/>
+            <a:off x="3848004" y="1181100"/>
+            <a:ext cx="4495688" cy="4495800"/>
           </a:xfrm>
           <a:prstGeom prst="rect">
             <a:avLst/>
@@ -3730,14 +3189,14 @@
       </p:pic>
       <p:sp>
         <p:nvSpPr>
-          <p:cNvPr id="18" name="TextBox 17"/>
+          <p:cNvPr id="5" name="TextBox 4"/>
           <p:cNvSpPr txBox="1"/>
           <p:nvPr/>
         </p:nvSpPr>
         <p:spPr>
           <a:xfrm>
-            <a:off x="7513132" y="807720"/>
-            <a:ext cx="3703227" cy="304800"/>
+            <a:off x="5013835" y="2377440"/>
+            <a:ext cx="2164026" cy="2103120"/>
           </a:xfrm>
           <a:prstGeom prst="rect">
             <a:avLst/>
@@ -3750,52 +3209,7 @@
           </a:bodyPr>
           <a:lstStyle/>
           <a:p>
-            <a:pPr algn="l">
-              <a:lnSpc>
-                <a:spcPct val="100000"/>
-              </a:lnSpc>
-              <a:spcBef>
-                <a:spcPts val="0"/>
-              </a:spcBef>
-              <a:spcAft>
-                <a:spcPts val="0"/>
-              </a:spcAft>
-              <a:defRPr sz="1700" b="1" i="0">
-                <a:solidFill>
-                  <a:srgbClr val="000000"/>
-                </a:solidFill>
-                <a:latin typeface="Arial"/>
-              </a:defRPr>
-            </a:pPr>
-            <a:r>
-              <a:t>Discovery</a:t>
-            </a:r>
-          </a:p>
-        </p:txBody>
-      </p:sp>
-      <p:sp>
-        <p:nvSpPr>
-          <p:cNvPr id="19" name="TextBox 18"/>
-          <p:cNvSpPr txBox="1"/>
-          <p:nvPr/>
-        </p:nvSpPr>
-        <p:spPr>
-          <a:xfrm>
-            <a:off x="7513132" y="1127760"/>
-            <a:ext cx="3703227" cy="388620"/>
-          </a:xfrm>
-          <a:prstGeom prst="rect">
-            <a:avLst/>
-          </a:prstGeom>
-          <a:noFill/>
-        </p:spPr>
-        <p:txBody>
-          <a:bodyPr wrap="square" lIns="0" rIns="0" tIns="0" bIns="0" anchor="t">
-            <a:noAutofit/>
-          </a:bodyPr>
-          <a:lstStyle/>
-          <a:p>
-            <a:pPr algn="l">
+            <a:pPr algn="ctr">
               <a:lnSpc>
                 <a:spcPct val="102000"/>
               </a:lnSpc>
@@ -3805,7 +3219,7 @@
               <a:spcAft>
                 <a:spcPts val="0"/>
               </a:spcAft>
-              <a:defRPr sz="1000" b="0" i="0">
+              <a:defRPr sz="2400" b="1" i="0">
                 <a:solidFill>
                   <a:srgbClr val="111111"/>
                 </a:solidFill>
@@ -3813,27 +3227,27 @@
               </a:defRPr>
             </a:pPr>
             <a:r>
-              <a:t>Teams work with customers to understand their specific problems.</a:t>
-            </a:r>
-          </a:p>
-        </p:txBody>
-      </p:sp>
-      <p:sp>
-        <p:nvSpPr>
-          <p:cNvPr id="20" name="Rounded Rectangle 19"/>
+              <a:t>AGILE VALUES IN PRACTICE</a:t>
+            </a:r>
+          </a:p>
+        </p:txBody>
+      </p:sp>
+      <p:sp>
+        <p:nvSpPr>
+          <p:cNvPr id="6" name="Rounded Rectangle 5"/>
           <p:cNvSpPr/>
           <p:nvPr/>
         </p:nvSpPr>
         <p:spPr>
           <a:xfrm>
-            <a:off x="6514937" y="2263140"/>
-            <a:ext cx="4952876" cy="914400"/>
+            <a:off x="259074" y="1082040"/>
+            <a:ext cx="3276518" cy="1051560"/>
           </a:xfrm>
           <a:prstGeom prst="roundRect">
             <a:avLst/>
           </a:prstGeom>
           <a:solidFill>
-            <a:srgbClr val="DDE1E6"/>
+            <a:srgbClr val="DFE3E8"/>
           </a:solidFill>
           <a:ln>
             <a:noFill/>
@@ -3863,24 +3277,112 @@
       </p:sp>
       <p:sp>
         <p:nvSpPr>
-          <p:cNvPr id="21" name="Rounded Rectangle 20"/>
+          <p:cNvPr id="7" name="Rounded Rectangle 6"/>
           <p:cNvSpPr/>
           <p:nvPr/>
         </p:nvSpPr>
         <p:spPr>
           <a:xfrm>
-            <a:off x="6476838" y="2209800"/>
-            <a:ext cx="4952876" cy="914400"/>
+            <a:off x="228594" y="1036320"/>
+            <a:ext cx="3276518" cy="1051560"/>
           </a:xfrm>
           <a:prstGeom prst="roundRect">
+            <a:avLst/>
+          </a:prstGeom>
+          <a:solidFill>
+            <a:srgbClr val="FBFBFC"/>
+          </a:solidFill>
+          <a:ln w="12700">
+            <a:solidFill>
+              <a:srgbClr val="E2E6EA"/>
+            </a:solidFill>
+          </a:ln>
+        </p:spPr>
+        <p:style>
+          <a:lnRef idx="1">
+            <a:schemeClr val="accent1"/>
+          </a:lnRef>
+          <a:fillRef idx="3">
+            <a:schemeClr val="accent1"/>
+          </a:fillRef>
+          <a:effectRef idx="2">
+            <a:schemeClr val="accent1"/>
+          </a:effectRef>
+          <a:fontRef idx="minor">
+            <a:schemeClr val="lt1"/>
+          </a:fontRef>
+        </p:style>
+        <p:txBody>
+          <a:bodyPr rtlCol="0" anchor="ctr"/>
+          <a:lstStyle/>
+          <a:p>
+            <a:pPr algn="ctr"/>
+          </a:p>
+        </p:txBody>
+      </p:sp>
+      <p:sp>
+        <p:nvSpPr>
+          <p:cNvPr id="8" name="Rounded Rectangle 7"/>
+          <p:cNvSpPr/>
+          <p:nvPr/>
+        </p:nvSpPr>
+        <p:spPr>
+          <a:xfrm>
+            <a:off x="3436534" y="1036320"/>
+            <a:ext cx="68578" cy="1051560"/>
+          </a:xfrm>
+          <a:prstGeom prst="roundRect">
+            <a:avLst/>
+          </a:prstGeom>
+          <a:solidFill>
+            <a:srgbClr val="FFC400"/>
+          </a:solidFill>
+          <a:ln>
+            <a:noFill/>
+          </a:ln>
+        </p:spPr>
+        <p:style>
+          <a:lnRef idx="1">
+            <a:schemeClr val="accent1"/>
+          </a:lnRef>
+          <a:fillRef idx="3">
+            <a:schemeClr val="accent1"/>
+          </a:fillRef>
+          <a:effectRef idx="2">
+            <a:schemeClr val="accent1"/>
+          </a:effectRef>
+          <a:fontRef idx="minor">
+            <a:schemeClr val="lt1"/>
+          </a:fontRef>
+        </p:style>
+        <p:txBody>
+          <a:bodyPr rtlCol="0" anchor="ctr"/>
+          <a:lstStyle/>
+          <a:p>
+            <a:pPr algn="ctr"/>
+          </a:p>
+        </p:txBody>
+      </p:sp>
+      <p:sp>
+        <p:nvSpPr>
+          <p:cNvPr id="9" name="Oval 8"/>
+          <p:cNvSpPr/>
+          <p:nvPr/>
+        </p:nvSpPr>
+        <p:spPr>
+          <a:xfrm>
+            <a:off x="2621214" y="1226820"/>
+            <a:ext cx="670543" cy="670560"/>
+          </a:xfrm>
+          <a:prstGeom prst="ellipse">
             <a:avLst/>
           </a:prstGeom>
           <a:solidFill>
             <a:srgbClr val="FFFFFF"/>
           </a:solidFill>
-          <a:ln w="12700">
+          <a:ln w="38100">
             <a:solidFill>
-              <a:srgbClr val="E2E5E9"/>
+              <a:srgbClr val="FFC400"/>
             </a:solidFill>
           </a:ln>
         </p:spPr>
@@ -3906,97 +3408,9 @@
           </a:p>
         </p:txBody>
       </p:sp>
-      <p:sp>
-        <p:nvSpPr>
-          <p:cNvPr id="22" name="Rounded Rectangle 21"/>
-          <p:cNvSpPr/>
-          <p:nvPr/>
-        </p:nvSpPr>
-        <p:spPr>
-          <a:xfrm>
-            <a:off x="6476838" y="2209800"/>
-            <a:ext cx="76198" cy="914400"/>
-          </a:xfrm>
-          <a:prstGeom prst="roundRect">
-            <a:avLst/>
-          </a:prstGeom>
-          <a:solidFill>
-            <a:srgbClr val="A6D24A"/>
-          </a:solidFill>
-          <a:ln>
-            <a:noFill/>
-          </a:ln>
-        </p:spPr>
-        <p:style>
-          <a:lnRef idx="1">
-            <a:schemeClr val="accent1"/>
-          </a:lnRef>
-          <a:fillRef idx="3">
-            <a:schemeClr val="accent1"/>
-          </a:fillRef>
-          <a:effectRef idx="2">
-            <a:schemeClr val="accent1"/>
-          </a:effectRef>
-          <a:fontRef idx="minor">
-            <a:schemeClr val="lt1"/>
-          </a:fontRef>
-        </p:style>
-        <p:txBody>
-          <a:bodyPr rtlCol="0" anchor="ctr"/>
-          <a:lstStyle/>
-          <a:p>
-            <a:pPr algn="ctr"/>
-          </a:p>
-        </p:txBody>
-      </p:sp>
-      <p:sp>
-        <p:nvSpPr>
-          <p:cNvPr id="23" name="Oval 22"/>
-          <p:cNvSpPr/>
-          <p:nvPr/>
-        </p:nvSpPr>
-        <p:spPr>
-          <a:xfrm>
-            <a:off x="6690193" y="2362200"/>
-            <a:ext cx="609585" cy="609600"/>
-          </a:xfrm>
-          <a:prstGeom prst="ellipse">
-            <a:avLst/>
-          </a:prstGeom>
-          <a:solidFill>
-            <a:srgbClr val="F8FAFC"/>
-          </a:solidFill>
-          <a:ln w="38100">
-            <a:solidFill>
-              <a:srgbClr val="A6D24A"/>
-            </a:solidFill>
-          </a:ln>
-        </p:spPr>
-        <p:style>
-          <a:lnRef idx="1">
-            <a:schemeClr val="accent1"/>
-          </a:lnRef>
-          <a:fillRef idx="3">
-            <a:schemeClr val="accent1"/>
-          </a:fillRef>
-          <a:effectRef idx="2">
-            <a:schemeClr val="accent1"/>
-          </a:effectRef>
-          <a:fontRef idx="minor">
-            <a:schemeClr val="lt1"/>
-          </a:fontRef>
-        </p:style>
-        <p:txBody>
-          <a:bodyPr rtlCol="0" anchor="ctr"/>
-          <a:lstStyle/>
-          <a:p>
-            <a:pPr algn="ctr"/>
-          </a:p>
-        </p:txBody>
-      </p:sp>
       <p:pic>
         <p:nvPicPr>
-          <p:cNvPr id="24" name="Picture 23" descr="tmpzl2_xo0b.png"/>
+          <p:cNvPr id="10" name="Picture 9" descr="tmpow1rhn8q.png"/>
           <p:cNvPicPr>
             <a:picLocks noChangeAspect="1"/>
           </p:cNvPicPr>
@@ -4010,8 +3424,8 @@
         </p:blipFill>
         <p:spPr>
           <a:xfrm>
-            <a:off x="6824301" y="2496312"/>
-            <a:ext cx="341367" cy="341376"/>
+            <a:off x="2768734" y="1374343"/>
+            <a:ext cx="375504" cy="375514"/>
           </a:xfrm>
           <a:prstGeom prst="rect">
             <a:avLst/>
@@ -4020,14 +3434,14 @@
       </p:pic>
       <p:sp>
         <p:nvSpPr>
-          <p:cNvPr id="25" name="TextBox 24"/>
+          <p:cNvPr id="11" name="TextBox 10"/>
           <p:cNvSpPr txBox="1"/>
           <p:nvPr/>
         </p:nvSpPr>
         <p:spPr>
           <a:xfrm>
-            <a:off x="7513132" y="2331720"/>
-            <a:ext cx="3703227" cy="304800"/>
+            <a:off x="411470" y="1280160"/>
+            <a:ext cx="2042109" cy="213360"/>
           </a:xfrm>
           <a:prstGeom prst="rect">
             <a:avLst/>
@@ -4040,7 +3454,7 @@
           </a:bodyPr>
           <a:lstStyle/>
           <a:p>
-            <a:pPr algn="l">
+            <a:pPr algn="r">
               <a:lnSpc>
                 <a:spcPct val="100000"/>
               </a:lnSpc>
@@ -4050,29 +3464,29 @@
               <a:spcAft>
                 <a:spcPts val="0"/>
               </a:spcAft>
-              <a:defRPr sz="1700" b="1" i="0">
+              <a:defRPr sz="1250" b="1" i="0">
                 <a:solidFill>
-                  <a:srgbClr val="000000"/>
+                  <a:srgbClr val="1A1A1A"/>
                 </a:solidFill>
                 <a:latin typeface="Arial"/>
               </a:defRPr>
             </a:pPr>
             <a:r>
-              <a:t>Iteration</a:t>
-            </a:r>
-          </a:p>
-        </p:txBody>
-      </p:sp>
-      <p:sp>
-        <p:nvSpPr>
-          <p:cNvPr id="26" name="TextBox 25"/>
+              <a:t>Collaborative Culture</a:t>
+            </a:r>
+          </a:p>
+        </p:txBody>
+      </p:sp>
+      <p:sp>
+        <p:nvSpPr>
+          <p:cNvPr id="12" name="TextBox 11"/>
           <p:cNvSpPr txBox="1"/>
           <p:nvPr/>
         </p:nvSpPr>
         <p:spPr>
           <a:xfrm>
-            <a:off x="7513132" y="2651760"/>
-            <a:ext cx="3703227" cy="388620"/>
+            <a:off x="411470" y="1524000"/>
+            <a:ext cx="2042109" cy="320040"/>
           </a:xfrm>
           <a:prstGeom prst="rect">
             <a:avLst/>
@@ -4085,9 +3499,9 @@
           </a:bodyPr>
           <a:lstStyle/>
           <a:p>
-            <a:pPr algn="l">
+            <a:pPr algn="r">
               <a:lnSpc>
-                <a:spcPct val="102000"/>
+                <a:spcPct val="100000"/>
               </a:lnSpc>
               <a:spcBef>
                 <a:spcPts val="0"/>
@@ -4095,35 +3509,35 @@
               <a:spcAft>
                 <a:spcPts val="0"/>
               </a:spcAft>
-              <a:defRPr sz="1100" b="0" i="0">
+              <a:defRPr sz="950" b="0" i="0">
                 <a:solidFill>
-                  <a:srgbClr val="111111"/>
+                  <a:srgbClr val="1A1A1A"/>
                 </a:solidFill>
                 <a:latin typeface="Arial"/>
               </a:defRPr>
             </a:pPr>
             <a:r>
-              <a:t>New features are developed in small, usable increments.</a:t>
-            </a:r>
-          </a:p>
-        </p:txBody>
-      </p:sp>
-      <p:sp>
-        <p:nvSpPr>
-          <p:cNvPr id="27" name="Rounded Rectangle 26"/>
+              <a:t>Team members work closely together and with stakeholders</a:t>
+            </a:r>
+          </a:p>
+        </p:txBody>
+      </p:sp>
+      <p:sp>
+        <p:nvSpPr>
+          <p:cNvPr id="13" name="Rounded Rectangle 12"/>
           <p:cNvSpPr/>
           <p:nvPr/>
         </p:nvSpPr>
         <p:spPr>
           <a:xfrm>
-            <a:off x="6514937" y="3787140"/>
-            <a:ext cx="4952876" cy="914400"/>
+            <a:off x="8717062" y="1082040"/>
+            <a:ext cx="3276518" cy="1051560"/>
           </a:xfrm>
           <a:prstGeom prst="roundRect">
             <a:avLst/>
           </a:prstGeom>
           <a:solidFill>
-            <a:srgbClr val="DDE1E6"/>
+            <a:srgbClr val="DFE3E8"/>
           </a:solidFill>
           <a:ln>
             <a:noFill/>
@@ -4153,24 +3567,112 @@
       </p:sp>
       <p:sp>
         <p:nvSpPr>
-          <p:cNvPr id="28" name="Rounded Rectangle 27"/>
+          <p:cNvPr id="14" name="Rounded Rectangle 13"/>
           <p:cNvSpPr/>
           <p:nvPr/>
         </p:nvSpPr>
         <p:spPr>
           <a:xfrm>
-            <a:off x="6476838" y="3733800"/>
-            <a:ext cx="4952876" cy="914400"/>
+            <a:off x="8686583" y="1036320"/>
+            <a:ext cx="3276518" cy="1051560"/>
           </a:xfrm>
           <a:prstGeom prst="roundRect">
+            <a:avLst/>
+          </a:prstGeom>
+          <a:solidFill>
+            <a:srgbClr val="FBFBFC"/>
+          </a:solidFill>
+          <a:ln w="12700">
+            <a:solidFill>
+              <a:srgbClr val="E2E6EA"/>
+            </a:solidFill>
+          </a:ln>
+        </p:spPr>
+        <p:style>
+          <a:lnRef idx="1">
+            <a:schemeClr val="accent1"/>
+          </a:lnRef>
+          <a:fillRef idx="3">
+            <a:schemeClr val="accent1"/>
+          </a:fillRef>
+          <a:effectRef idx="2">
+            <a:schemeClr val="accent1"/>
+          </a:effectRef>
+          <a:fontRef idx="minor">
+            <a:schemeClr val="lt1"/>
+          </a:fontRef>
+        </p:style>
+        <p:txBody>
+          <a:bodyPr rtlCol="0" anchor="ctr"/>
+          <a:lstStyle/>
+          <a:p>
+            <a:pPr algn="ctr"/>
+          </a:p>
+        </p:txBody>
+      </p:sp>
+      <p:sp>
+        <p:nvSpPr>
+          <p:cNvPr id="15" name="Rounded Rectangle 14"/>
+          <p:cNvSpPr/>
+          <p:nvPr/>
+        </p:nvSpPr>
+        <p:spPr>
+          <a:xfrm>
+            <a:off x="8686583" y="1036320"/>
+            <a:ext cx="68578" cy="1051560"/>
+          </a:xfrm>
+          <a:prstGeom prst="roundRect">
+            <a:avLst/>
+          </a:prstGeom>
+          <a:solidFill>
+            <a:srgbClr val="A7D348"/>
+          </a:solidFill>
+          <a:ln>
+            <a:noFill/>
+          </a:ln>
+        </p:spPr>
+        <p:style>
+          <a:lnRef idx="1">
+            <a:schemeClr val="accent1"/>
+          </a:lnRef>
+          <a:fillRef idx="3">
+            <a:schemeClr val="accent1"/>
+          </a:fillRef>
+          <a:effectRef idx="2">
+            <a:schemeClr val="accent1"/>
+          </a:effectRef>
+          <a:fontRef idx="minor">
+            <a:schemeClr val="lt1"/>
+          </a:fontRef>
+        </p:style>
+        <p:txBody>
+          <a:bodyPr rtlCol="0" anchor="ctr"/>
+          <a:lstStyle/>
+          <a:p>
+            <a:pPr algn="ctr"/>
+          </a:p>
+        </p:txBody>
+      </p:sp>
+      <p:sp>
+        <p:nvSpPr>
+          <p:cNvPr id="16" name="Oval 15"/>
+          <p:cNvSpPr/>
+          <p:nvPr/>
+        </p:nvSpPr>
+        <p:spPr>
+          <a:xfrm>
+            <a:off x="8899937" y="1226820"/>
+            <a:ext cx="670543" cy="670560"/>
+          </a:xfrm>
+          <a:prstGeom prst="ellipse">
             <a:avLst/>
           </a:prstGeom>
           <a:solidFill>
             <a:srgbClr val="FFFFFF"/>
           </a:solidFill>
-          <a:ln w="12700">
+          <a:ln w="38100">
             <a:solidFill>
-              <a:srgbClr val="E2E5E9"/>
+              <a:srgbClr val="A7D348"/>
             </a:solidFill>
           </a:ln>
         </p:spPr>
@@ -4196,97 +3698,9 @@
           </a:p>
         </p:txBody>
       </p:sp>
-      <p:sp>
-        <p:nvSpPr>
-          <p:cNvPr id="29" name="Rounded Rectangle 28"/>
-          <p:cNvSpPr/>
-          <p:nvPr/>
-        </p:nvSpPr>
-        <p:spPr>
-          <a:xfrm>
-            <a:off x="6476838" y="3733800"/>
-            <a:ext cx="76198" cy="914400"/>
-          </a:xfrm>
-          <a:prstGeom prst="roundRect">
-            <a:avLst/>
-          </a:prstGeom>
-          <a:solidFill>
-            <a:srgbClr val="12CDA5"/>
-          </a:solidFill>
-          <a:ln>
-            <a:noFill/>
-          </a:ln>
-        </p:spPr>
-        <p:style>
-          <a:lnRef idx="1">
-            <a:schemeClr val="accent1"/>
-          </a:lnRef>
-          <a:fillRef idx="3">
-            <a:schemeClr val="accent1"/>
-          </a:fillRef>
-          <a:effectRef idx="2">
-            <a:schemeClr val="accent1"/>
-          </a:effectRef>
-          <a:fontRef idx="minor">
-            <a:schemeClr val="lt1"/>
-          </a:fontRef>
-        </p:style>
-        <p:txBody>
-          <a:bodyPr rtlCol="0" anchor="ctr"/>
-          <a:lstStyle/>
-          <a:p>
-            <a:pPr algn="ctr"/>
-          </a:p>
-        </p:txBody>
-      </p:sp>
-      <p:sp>
-        <p:nvSpPr>
-          <p:cNvPr id="30" name="Oval 29"/>
-          <p:cNvSpPr/>
-          <p:nvPr/>
-        </p:nvSpPr>
-        <p:spPr>
-          <a:xfrm>
-            <a:off x="6690193" y="3886200"/>
-            <a:ext cx="609585" cy="609600"/>
-          </a:xfrm>
-          <a:prstGeom prst="ellipse">
-            <a:avLst/>
-          </a:prstGeom>
-          <a:solidFill>
-            <a:srgbClr val="F8FAFC"/>
-          </a:solidFill>
-          <a:ln w="38100">
-            <a:solidFill>
-              <a:srgbClr val="12CDA5"/>
-            </a:solidFill>
-          </a:ln>
-        </p:spPr>
-        <p:style>
-          <a:lnRef idx="1">
-            <a:schemeClr val="accent1"/>
-          </a:lnRef>
-          <a:fillRef idx="3">
-            <a:schemeClr val="accent1"/>
-          </a:fillRef>
-          <a:effectRef idx="2">
-            <a:schemeClr val="accent1"/>
-          </a:effectRef>
-          <a:fontRef idx="minor">
-            <a:schemeClr val="lt1"/>
-          </a:fontRef>
-        </p:style>
-        <p:txBody>
-          <a:bodyPr rtlCol="0" anchor="ctr"/>
-          <a:lstStyle/>
-          <a:p>
-            <a:pPr algn="ctr"/>
-          </a:p>
-        </p:txBody>
-      </p:sp>
       <p:pic>
         <p:nvPicPr>
-          <p:cNvPr id="31" name="Picture 30" descr="tmpyz81z4hr.png"/>
+          <p:cNvPr id="17" name="Picture 16" descr="tmp1xdq5lye.png"/>
           <p:cNvPicPr>
             <a:picLocks noChangeAspect="1"/>
           </p:cNvPicPr>
@@ -4300,8 +3714,8 @@
         </p:blipFill>
         <p:spPr>
           <a:xfrm>
-            <a:off x="6824301" y="4020312"/>
-            <a:ext cx="341367" cy="341376"/>
+            <a:off x="9047457" y="1374343"/>
+            <a:ext cx="375504" cy="375514"/>
           </a:xfrm>
           <a:prstGeom prst="rect">
             <a:avLst/>
@@ -4310,14 +3724,14 @@
       </p:pic>
       <p:sp>
         <p:nvSpPr>
-          <p:cNvPr id="32" name="TextBox 31"/>
+          <p:cNvPr id="18" name="TextBox 17"/>
           <p:cNvSpPr txBox="1"/>
           <p:nvPr/>
         </p:nvSpPr>
         <p:spPr>
           <a:xfrm>
-            <a:off x="7513132" y="3855720"/>
-            <a:ext cx="3703227" cy="304800"/>
+            <a:off x="9753356" y="1188720"/>
+            <a:ext cx="2026869" cy="396240"/>
           </a:xfrm>
           <a:prstGeom prst="rect">
             <a:avLst/>
@@ -4340,29 +3754,29 @@
               <a:spcAft>
                 <a:spcPts val="0"/>
               </a:spcAft>
-              <a:defRPr sz="1700" b="1" i="0">
+              <a:defRPr sz="1250" b="1" i="0">
                 <a:solidFill>
-                  <a:srgbClr val="000000"/>
+                  <a:srgbClr val="1A1A1A"/>
                 </a:solidFill>
                 <a:latin typeface="Arial"/>
               </a:defRPr>
             </a:pPr>
             <a:r>
-              <a:t>Feedback</a:t>
-            </a:r>
-          </a:p>
-        </p:txBody>
-      </p:sp>
-      <p:sp>
-        <p:nvSpPr>
-          <p:cNvPr id="33" name="TextBox 32"/>
+              <a:t>Transparent Communication</a:t>
+            </a:r>
+          </a:p>
+        </p:txBody>
+      </p:sp>
+      <p:sp>
+        <p:nvSpPr>
+          <p:cNvPr id="19" name="TextBox 18"/>
           <p:cNvSpPr txBox="1"/>
           <p:nvPr/>
         </p:nvSpPr>
         <p:spPr>
           <a:xfrm>
-            <a:off x="7513132" y="4175760"/>
-            <a:ext cx="3703227" cy="388620"/>
+            <a:off x="9753356" y="1615440"/>
+            <a:ext cx="2026869" cy="320040"/>
           </a:xfrm>
           <a:prstGeom prst="rect">
             <a:avLst/>
@@ -4377,7 +3791,7 @@
           <a:p>
             <a:pPr algn="l">
               <a:lnSpc>
-                <a:spcPct val="102000"/>
+                <a:spcPct val="100000"/>
               </a:lnSpc>
               <a:spcBef>
                 <a:spcPts val="0"/>
@@ -4385,35 +3799,35 @@
               <a:spcAft>
                 <a:spcPts val="0"/>
               </a:spcAft>
-              <a:defRPr sz="1000" b="0" i="0">
+              <a:defRPr sz="950" b="0" i="0">
                 <a:solidFill>
-                  <a:srgbClr val="111111"/>
+                  <a:srgbClr val="1A1A1A"/>
                 </a:solidFill>
                 <a:latin typeface="Arial"/>
               </a:defRPr>
             </a:pPr>
             <a:r>
-              <a:t>Customer feedback is continuously integrated into the development.</a:t>
-            </a:r>
-          </a:p>
-        </p:txBody>
-      </p:sp>
-      <p:sp>
-        <p:nvSpPr>
-          <p:cNvPr id="34" name="Rounded Rectangle 33"/>
+              <a:t>Openly share progress and challenges to build trust.</a:t>
+            </a:r>
+          </a:p>
+        </p:txBody>
+      </p:sp>
+      <p:sp>
+        <p:nvSpPr>
+          <p:cNvPr id="20" name="Rounded Rectangle 19"/>
           <p:cNvSpPr/>
           <p:nvPr/>
         </p:nvSpPr>
         <p:spPr>
           <a:xfrm>
-            <a:off x="6514937" y="5311140"/>
-            <a:ext cx="4952876" cy="914400"/>
+            <a:off x="8717062" y="2948940"/>
+            <a:ext cx="3276518" cy="1051560"/>
           </a:xfrm>
           <a:prstGeom prst="roundRect">
             <a:avLst/>
           </a:prstGeom>
           <a:solidFill>
-            <a:srgbClr val="DDE1E6"/>
+            <a:srgbClr val="DFE3E8"/>
           </a:solidFill>
           <a:ln>
             <a:noFill/>
@@ -4443,24 +3857,112 @@
       </p:sp>
       <p:sp>
         <p:nvSpPr>
-          <p:cNvPr id="35" name="Rounded Rectangle 34"/>
+          <p:cNvPr id="21" name="Rounded Rectangle 20"/>
           <p:cNvSpPr/>
           <p:nvPr/>
         </p:nvSpPr>
         <p:spPr>
           <a:xfrm>
-            <a:off x="6476838" y="5257800"/>
-            <a:ext cx="4952876" cy="914400"/>
+            <a:off x="8686583" y="2903220"/>
+            <a:ext cx="3276518" cy="1051560"/>
           </a:xfrm>
           <a:prstGeom prst="roundRect">
+            <a:avLst/>
+          </a:prstGeom>
+          <a:solidFill>
+            <a:srgbClr val="FBFBFC"/>
+          </a:solidFill>
+          <a:ln w="12700">
+            <a:solidFill>
+              <a:srgbClr val="E2E6EA"/>
+            </a:solidFill>
+          </a:ln>
+        </p:spPr>
+        <p:style>
+          <a:lnRef idx="1">
+            <a:schemeClr val="accent1"/>
+          </a:lnRef>
+          <a:fillRef idx="3">
+            <a:schemeClr val="accent1"/>
+          </a:fillRef>
+          <a:effectRef idx="2">
+            <a:schemeClr val="accent1"/>
+          </a:effectRef>
+          <a:fontRef idx="minor">
+            <a:schemeClr val="lt1"/>
+          </a:fontRef>
+        </p:style>
+        <p:txBody>
+          <a:bodyPr rtlCol="0" anchor="ctr"/>
+          <a:lstStyle/>
+          <a:p>
+            <a:pPr algn="ctr"/>
+          </a:p>
+        </p:txBody>
+      </p:sp>
+      <p:sp>
+        <p:nvSpPr>
+          <p:cNvPr id="22" name="Rounded Rectangle 21"/>
+          <p:cNvSpPr/>
+          <p:nvPr/>
+        </p:nvSpPr>
+        <p:spPr>
+          <a:xfrm>
+            <a:off x="8686583" y="2903220"/>
+            <a:ext cx="68578" cy="1051560"/>
+          </a:xfrm>
+          <a:prstGeom prst="roundRect">
+            <a:avLst/>
+          </a:prstGeom>
+          <a:solidFill>
+            <a:srgbClr val="10CFA7"/>
+          </a:solidFill>
+          <a:ln>
+            <a:noFill/>
+          </a:ln>
+        </p:spPr>
+        <p:style>
+          <a:lnRef idx="1">
+            <a:schemeClr val="accent1"/>
+          </a:lnRef>
+          <a:fillRef idx="3">
+            <a:schemeClr val="accent1"/>
+          </a:fillRef>
+          <a:effectRef idx="2">
+            <a:schemeClr val="accent1"/>
+          </a:effectRef>
+          <a:fontRef idx="minor">
+            <a:schemeClr val="lt1"/>
+          </a:fontRef>
+        </p:style>
+        <p:txBody>
+          <a:bodyPr rtlCol="0" anchor="ctr"/>
+          <a:lstStyle/>
+          <a:p>
+            <a:pPr algn="ctr"/>
+          </a:p>
+        </p:txBody>
+      </p:sp>
+      <p:sp>
+        <p:nvSpPr>
+          <p:cNvPr id="23" name="Oval 22"/>
+          <p:cNvSpPr/>
+          <p:nvPr/>
+        </p:nvSpPr>
+        <p:spPr>
+          <a:xfrm>
+            <a:off x="8899937" y="3093720"/>
+            <a:ext cx="670543" cy="670560"/>
+          </a:xfrm>
+          <a:prstGeom prst="ellipse">
             <a:avLst/>
           </a:prstGeom>
           <a:solidFill>
             <a:srgbClr val="FFFFFF"/>
           </a:solidFill>
-          <a:ln w="12700">
+          <a:ln w="38100">
             <a:solidFill>
-              <a:srgbClr val="E2E5E9"/>
+              <a:srgbClr val="10CFA7"/>
             </a:solidFill>
           </a:ln>
         </p:spPr>
@@ -4486,97 +3988,9 @@
           </a:p>
         </p:txBody>
       </p:sp>
-      <p:sp>
-        <p:nvSpPr>
-          <p:cNvPr id="36" name="Rounded Rectangle 35"/>
-          <p:cNvSpPr/>
-          <p:nvPr/>
-        </p:nvSpPr>
-        <p:spPr>
-          <a:xfrm>
-            <a:off x="6476838" y="5257800"/>
-            <a:ext cx="76198" cy="914400"/>
-          </a:xfrm>
-          <a:prstGeom prst="roundRect">
-            <a:avLst/>
-          </a:prstGeom>
-          <a:solidFill>
-            <a:srgbClr val="18B7CF"/>
-          </a:solidFill>
-          <a:ln>
-            <a:noFill/>
-          </a:ln>
-        </p:spPr>
-        <p:style>
-          <a:lnRef idx="1">
-            <a:schemeClr val="accent1"/>
-          </a:lnRef>
-          <a:fillRef idx="3">
-            <a:schemeClr val="accent1"/>
-          </a:fillRef>
-          <a:effectRef idx="2">
-            <a:schemeClr val="accent1"/>
-          </a:effectRef>
-          <a:fontRef idx="minor">
-            <a:schemeClr val="lt1"/>
-          </a:fontRef>
-        </p:style>
-        <p:txBody>
-          <a:bodyPr rtlCol="0" anchor="ctr"/>
-          <a:lstStyle/>
-          <a:p>
-            <a:pPr algn="ctr"/>
-          </a:p>
-        </p:txBody>
-      </p:sp>
-      <p:sp>
-        <p:nvSpPr>
-          <p:cNvPr id="37" name="Oval 36"/>
-          <p:cNvSpPr/>
-          <p:nvPr/>
-        </p:nvSpPr>
-        <p:spPr>
-          <a:xfrm>
-            <a:off x="6690193" y="5410200"/>
-            <a:ext cx="609585" cy="609600"/>
-          </a:xfrm>
-          <a:prstGeom prst="ellipse">
-            <a:avLst/>
-          </a:prstGeom>
-          <a:solidFill>
-            <a:srgbClr val="F8FAFC"/>
-          </a:solidFill>
-          <a:ln w="38100">
-            <a:solidFill>
-              <a:srgbClr val="18B7CF"/>
-            </a:solidFill>
-          </a:ln>
-        </p:spPr>
-        <p:style>
-          <a:lnRef idx="1">
-            <a:schemeClr val="accent1"/>
-          </a:lnRef>
-          <a:fillRef idx="3">
-            <a:schemeClr val="accent1"/>
-          </a:fillRef>
-          <a:effectRef idx="2">
-            <a:schemeClr val="accent1"/>
-          </a:effectRef>
-          <a:fontRef idx="minor">
-            <a:schemeClr val="lt1"/>
-          </a:fontRef>
-        </p:style>
-        <p:txBody>
-          <a:bodyPr rtlCol="0" anchor="ctr"/>
-          <a:lstStyle/>
-          <a:p>
-            <a:pPr algn="ctr"/>
-          </a:p>
-        </p:txBody>
-      </p:sp>
       <p:pic>
         <p:nvPicPr>
-          <p:cNvPr id="38" name="Picture 37" descr="tmpcrqld340.png"/>
+          <p:cNvPr id="24" name="Picture 23" descr="tmp23fd6tet.png"/>
           <p:cNvPicPr>
             <a:picLocks noChangeAspect="1"/>
           </p:cNvPicPr>
@@ -4590,8 +4004,8 @@
         </p:blipFill>
         <p:spPr>
           <a:xfrm>
-            <a:off x="6824301" y="5544312"/>
-            <a:ext cx="341367" cy="341376"/>
+            <a:off x="9047457" y="3241243"/>
+            <a:ext cx="375504" cy="375514"/>
           </a:xfrm>
           <a:prstGeom prst="rect">
             <a:avLst/>
@@ -4600,14 +4014,14 @@
       </p:pic>
       <p:sp>
         <p:nvSpPr>
-          <p:cNvPr id="39" name="TextBox 38"/>
+          <p:cNvPr id="25" name="TextBox 24"/>
           <p:cNvSpPr txBox="1"/>
           <p:nvPr/>
         </p:nvSpPr>
         <p:spPr>
           <a:xfrm>
-            <a:off x="7513132" y="5379720"/>
-            <a:ext cx="3703227" cy="304800"/>
+            <a:off x="9753356" y="3147060"/>
+            <a:ext cx="2026869" cy="213360"/>
           </a:xfrm>
           <a:prstGeom prst="rect">
             <a:avLst/>
@@ -4630,29 +4044,29 @@
               <a:spcAft>
                 <a:spcPts val="0"/>
               </a:spcAft>
-              <a:defRPr sz="1700" b="1" i="0">
+              <a:defRPr sz="1250" b="1" i="0">
                 <a:solidFill>
-                  <a:srgbClr val="000000"/>
+                  <a:srgbClr val="1A1A1A"/>
                 </a:solidFill>
                 <a:latin typeface="Arial"/>
               </a:defRPr>
             </a:pPr>
             <a:r>
-              <a:t>Delivery</a:t>
-            </a:r>
-          </a:p>
-        </p:txBody>
-      </p:sp>
-      <p:sp>
-        <p:nvSpPr>
-          <p:cNvPr id="40" name="TextBox 39"/>
+              <a:t>Self-Organization</a:t>
+            </a:r>
+          </a:p>
+        </p:txBody>
+      </p:sp>
+      <p:sp>
+        <p:nvSpPr>
+          <p:cNvPr id="26" name="TextBox 25"/>
           <p:cNvSpPr txBox="1"/>
           <p:nvPr/>
         </p:nvSpPr>
         <p:spPr>
           <a:xfrm>
-            <a:off x="7513132" y="5699760"/>
-            <a:ext cx="3703227" cy="388620"/>
+            <a:off x="9753356" y="3390900"/>
+            <a:ext cx="2026869" cy="320040"/>
           </a:xfrm>
           <a:prstGeom prst="rect">
             <a:avLst/>
@@ -4667,7 +4081,7 @@
           <a:p>
             <a:pPr algn="l">
               <a:lnSpc>
-                <a:spcPct val="102000"/>
+                <a:spcPct val="100000"/>
               </a:lnSpc>
               <a:spcBef>
                 <a:spcPts val="0"/>
@@ -4675,15 +4089,885 @@
               <a:spcAft>
                 <a:spcPts val="0"/>
               </a:spcAft>
-              <a:defRPr sz="1350" b="0" i="0">
+              <a:defRPr sz="950" b="0" i="0">
                 <a:solidFill>
-                  <a:srgbClr val="111111"/>
+                  <a:srgbClr val="1A1A1A"/>
                 </a:solidFill>
                 <a:latin typeface="Arial"/>
               </a:defRPr>
             </a:pPr>
             <a:r>
-              <a:t>The team releases usable products frequently.</a:t>
+              <a:t>Teams manage their own work and problem-solving processes.</a:t>
+            </a:r>
+          </a:p>
+        </p:txBody>
+      </p:sp>
+      <p:sp>
+        <p:nvSpPr>
+          <p:cNvPr id="27" name="Rounded Rectangle 26"/>
+          <p:cNvSpPr/>
+          <p:nvPr/>
+        </p:nvSpPr>
+        <p:spPr>
+          <a:xfrm>
+            <a:off x="8717062" y="4815840"/>
+            <a:ext cx="3276518" cy="1051560"/>
+          </a:xfrm>
+          <a:prstGeom prst="roundRect">
+            <a:avLst/>
+          </a:prstGeom>
+          <a:solidFill>
+            <a:srgbClr val="DFE3E8"/>
+          </a:solidFill>
+          <a:ln>
+            <a:noFill/>
+          </a:ln>
+        </p:spPr>
+        <p:style>
+          <a:lnRef idx="1">
+            <a:schemeClr val="accent1"/>
+          </a:lnRef>
+          <a:fillRef idx="3">
+            <a:schemeClr val="accent1"/>
+          </a:fillRef>
+          <a:effectRef idx="2">
+            <a:schemeClr val="accent1"/>
+          </a:effectRef>
+          <a:fontRef idx="minor">
+            <a:schemeClr val="lt1"/>
+          </a:fontRef>
+        </p:style>
+        <p:txBody>
+          <a:bodyPr rtlCol="0" anchor="ctr"/>
+          <a:lstStyle/>
+          <a:p>
+            <a:pPr algn="ctr"/>
+          </a:p>
+        </p:txBody>
+      </p:sp>
+      <p:sp>
+        <p:nvSpPr>
+          <p:cNvPr id="28" name="Rounded Rectangle 27"/>
+          <p:cNvSpPr/>
+          <p:nvPr/>
+        </p:nvSpPr>
+        <p:spPr>
+          <a:xfrm>
+            <a:off x="8686583" y="4770120"/>
+            <a:ext cx="3276518" cy="1051560"/>
+          </a:xfrm>
+          <a:prstGeom prst="roundRect">
+            <a:avLst/>
+          </a:prstGeom>
+          <a:solidFill>
+            <a:srgbClr val="FBFBFC"/>
+          </a:solidFill>
+          <a:ln w="12700">
+            <a:solidFill>
+              <a:srgbClr val="E2E6EA"/>
+            </a:solidFill>
+          </a:ln>
+        </p:spPr>
+        <p:style>
+          <a:lnRef idx="1">
+            <a:schemeClr val="accent1"/>
+          </a:lnRef>
+          <a:fillRef idx="3">
+            <a:schemeClr val="accent1"/>
+          </a:fillRef>
+          <a:effectRef idx="2">
+            <a:schemeClr val="accent1"/>
+          </a:effectRef>
+          <a:fontRef idx="minor">
+            <a:schemeClr val="lt1"/>
+          </a:fontRef>
+        </p:style>
+        <p:txBody>
+          <a:bodyPr rtlCol="0" anchor="ctr"/>
+          <a:lstStyle/>
+          <a:p>
+            <a:pPr algn="ctr"/>
+          </a:p>
+        </p:txBody>
+      </p:sp>
+      <p:sp>
+        <p:nvSpPr>
+          <p:cNvPr id="29" name="Rounded Rectangle 28"/>
+          <p:cNvSpPr/>
+          <p:nvPr/>
+        </p:nvSpPr>
+        <p:spPr>
+          <a:xfrm>
+            <a:off x="8686583" y="4770120"/>
+            <a:ext cx="68578" cy="1051560"/>
+          </a:xfrm>
+          <a:prstGeom prst="roundRect">
+            <a:avLst/>
+          </a:prstGeom>
+          <a:solidFill>
+            <a:srgbClr val="8A79DA"/>
+          </a:solidFill>
+          <a:ln>
+            <a:noFill/>
+          </a:ln>
+        </p:spPr>
+        <p:style>
+          <a:lnRef idx="1">
+            <a:schemeClr val="accent1"/>
+          </a:lnRef>
+          <a:fillRef idx="3">
+            <a:schemeClr val="accent1"/>
+          </a:fillRef>
+          <a:effectRef idx="2">
+            <a:schemeClr val="accent1"/>
+          </a:effectRef>
+          <a:fontRef idx="minor">
+            <a:schemeClr val="lt1"/>
+          </a:fontRef>
+        </p:style>
+        <p:txBody>
+          <a:bodyPr rtlCol="0" anchor="ctr"/>
+          <a:lstStyle/>
+          <a:p>
+            <a:pPr algn="ctr"/>
+          </a:p>
+        </p:txBody>
+      </p:sp>
+      <p:sp>
+        <p:nvSpPr>
+          <p:cNvPr id="30" name="Oval 29"/>
+          <p:cNvSpPr/>
+          <p:nvPr/>
+        </p:nvSpPr>
+        <p:spPr>
+          <a:xfrm>
+            <a:off x="8899937" y="4960620"/>
+            <a:ext cx="670543" cy="670560"/>
+          </a:xfrm>
+          <a:prstGeom prst="ellipse">
+            <a:avLst/>
+          </a:prstGeom>
+          <a:solidFill>
+            <a:srgbClr val="FFFFFF"/>
+          </a:solidFill>
+          <a:ln w="38100">
+            <a:solidFill>
+              <a:srgbClr val="8A79DA"/>
+            </a:solidFill>
+          </a:ln>
+        </p:spPr>
+        <p:style>
+          <a:lnRef idx="1">
+            <a:schemeClr val="accent1"/>
+          </a:lnRef>
+          <a:fillRef idx="3">
+            <a:schemeClr val="accent1"/>
+          </a:fillRef>
+          <a:effectRef idx="2">
+            <a:schemeClr val="accent1"/>
+          </a:effectRef>
+          <a:fontRef idx="minor">
+            <a:schemeClr val="lt1"/>
+          </a:fontRef>
+        </p:style>
+        <p:txBody>
+          <a:bodyPr rtlCol="0" anchor="ctr"/>
+          <a:lstStyle/>
+          <a:p>
+            <a:pPr algn="ctr"/>
+          </a:p>
+        </p:txBody>
+      </p:sp>
+      <p:pic>
+        <p:nvPicPr>
+          <p:cNvPr id="31" name="Picture 30" descr="tmpoxvuxw0l.png"/>
+          <p:cNvPicPr>
+            <a:picLocks noChangeAspect="1"/>
+          </p:cNvPicPr>
+          <p:nvPr/>
+        </p:nvPicPr>
+        <p:blipFill>
+          <a:blip r:embed="rId7"/>
+          <a:stretch>
+            <a:fillRect/>
+          </a:stretch>
+        </p:blipFill>
+        <p:spPr>
+          <a:xfrm>
+            <a:off x="9047457" y="5108143"/>
+            <a:ext cx="375504" cy="375514"/>
+          </a:xfrm>
+          <a:prstGeom prst="rect">
+            <a:avLst/>
+          </a:prstGeom>
+        </p:spPr>
+      </p:pic>
+      <p:sp>
+        <p:nvSpPr>
+          <p:cNvPr id="32" name="TextBox 31"/>
+          <p:cNvSpPr txBox="1"/>
+          <p:nvPr/>
+        </p:nvSpPr>
+        <p:spPr>
+          <a:xfrm>
+            <a:off x="9753356" y="5013960"/>
+            <a:ext cx="2026869" cy="213360"/>
+          </a:xfrm>
+          <a:prstGeom prst="rect">
+            <a:avLst/>
+          </a:prstGeom>
+          <a:noFill/>
+        </p:spPr>
+        <p:txBody>
+          <a:bodyPr wrap="square" lIns="0" rIns="0" tIns="0" bIns="0" anchor="ctr">
+            <a:noAutofit/>
+          </a:bodyPr>
+          <a:lstStyle/>
+          <a:p>
+            <a:pPr algn="l">
+              <a:lnSpc>
+                <a:spcPct val="100000"/>
+              </a:lnSpc>
+              <a:spcBef>
+                <a:spcPts val="0"/>
+              </a:spcBef>
+              <a:spcAft>
+                <a:spcPts val="0"/>
+              </a:spcAft>
+              <a:defRPr sz="1250" b="1" i="0">
+                <a:solidFill>
+                  <a:srgbClr val="1A1A1A"/>
+                </a:solidFill>
+                <a:latin typeface="Arial"/>
+              </a:defRPr>
+            </a:pPr>
+            <a:r>
+              <a:t>Adaptability</a:t>
+            </a:r>
+          </a:p>
+        </p:txBody>
+      </p:sp>
+      <p:sp>
+        <p:nvSpPr>
+          <p:cNvPr id="33" name="TextBox 32"/>
+          <p:cNvSpPr txBox="1"/>
+          <p:nvPr/>
+        </p:nvSpPr>
+        <p:spPr>
+          <a:xfrm>
+            <a:off x="9753356" y="5257800"/>
+            <a:ext cx="2026869" cy="320040"/>
+          </a:xfrm>
+          <a:prstGeom prst="rect">
+            <a:avLst/>
+          </a:prstGeom>
+          <a:noFill/>
+        </p:spPr>
+        <p:txBody>
+          <a:bodyPr wrap="square" lIns="0" rIns="0" tIns="0" bIns="0" anchor="t">
+            <a:noAutofit/>
+          </a:bodyPr>
+          <a:lstStyle/>
+          <a:p>
+            <a:pPr algn="l">
+              <a:lnSpc>
+                <a:spcPct val="100000"/>
+              </a:lnSpc>
+              <a:spcBef>
+                <a:spcPts val="0"/>
+              </a:spcBef>
+              <a:spcAft>
+                <a:spcPts val="0"/>
+              </a:spcAft>
+              <a:defRPr sz="950" b="0" i="0">
+                <a:solidFill>
+                  <a:srgbClr val="1A1A1A"/>
+                </a:solidFill>
+                <a:latin typeface="Arial"/>
+              </a:defRPr>
+            </a:pPr>
+            <a:r>
+              <a:t>The team can pivot quickly based on new information.</a:t>
+            </a:r>
+          </a:p>
+        </p:txBody>
+      </p:sp>
+      <p:sp>
+        <p:nvSpPr>
+          <p:cNvPr id="34" name="Rounded Rectangle 33"/>
+          <p:cNvSpPr/>
+          <p:nvPr/>
+        </p:nvSpPr>
+        <p:spPr>
+          <a:xfrm>
+            <a:off x="259074" y="4815840"/>
+            <a:ext cx="3276518" cy="1051560"/>
+          </a:xfrm>
+          <a:prstGeom prst="roundRect">
+            <a:avLst/>
+          </a:prstGeom>
+          <a:solidFill>
+            <a:srgbClr val="DFE3E8"/>
+          </a:solidFill>
+          <a:ln>
+            <a:noFill/>
+          </a:ln>
+        </p:spPr>
+        <p:style>
+          <a:lnRef idx="1">
+            <a:schemeClr val="accent1"/>
+          </a:lnRef>
+          <a:fillRef idx="3">
+            <a:schemeClr val="accent1"/>
+          </a:fillRef>
+          <a:effectRef idx="2">
+            <a:schemeClr val="accent1"/>
+          </a:effectRef>
+          <a:fontRef idx="minor">
+            <a:schemeClr val="lt1"/>
+          </a:fontRef>
+        </p:style>
+        <p:txBody>
+          <a:bodyPr rtlCol="0" anchor="ctr"/>
+          <a:lstStyle/>
+          <a:p>
+            <a:pPr algn="ctr"/>
+          </a:p>
+        </p:txBody>
+      </p:sp>
+      <p:sp>
+        <p:nvSpPr>
+          <p:cNvPr id="35" name="Rounded Rectangle 34"/>
+          <p:cNvSpPr/>
+          <p:nvPr/>
+        </p:nvSpPr>
+        <p:spPr>
+          <a:xfrm>
+            <a:off x="228594" y="4770120"/>
+            <a:ext cx="3276518" cy="1051560"/>
+          </a:xfrm>
+          <a:prstGeom prst="roundRect">
+            <a:avLst/>
+          </a:prstGeom>
+          <a:solidFill>
+            <a:srgbClr val="FBFBFC"/>
+          </a:solidFill>
+          <a:ln w="12700">
+            <a:solidFill>
+              <a:srgbClr val="E2E6EA"/>
+            </a:solidFill>
+          </a:ln>
+        </p:spPr>
+        <p:style>
+          <a:lnRef idx="1">
+            <a:schemeClr val="accent1"/>
+          </a:lnRef>
+          <a:fillRef idx="3">
+            <a:schemeClr val="accent1"/>
+          </a:fillRef>
+          <a:effectRef idx="2">
+            <a:schemeClr val="accent1"/>
+          </a:effectRef>
+          <a:fontRef idx="minor">
+            <a:schemeClr val="lt1"/>
+          </a:fontRef>
+        </p:style>
+        <p:txBody>
+          <a:bodyPr rtlCol="0" anchor="ctr"/>
+          <a:lstStyle/>
+          <a:p>
+            <a:pPr algn="ctr"/>
+          </a:p>
+        </p:txBody>
+      </p:sp>
+      <p:sp>
+        <p:nvSpPr>
+          <p:cNvPr id="36" name="Rounded Rectangle 35"/>
+          <p:cNvSpPr/>
+          <p:nvPr/>
+        </p:nvSpPr>
+        <p:spPr>
+          <a:xfrm>
+            <a:off x="3436534" y="4770120"/>
+            <a:ext cx="68578" cy="1051560"/>
+          </a:xfrm>
+          <a:prstGeom prst="roundRect">
+            <a:avLst/>
+          </a:prstGeom>
+          <a:solidFill>
+            <a:srgbClr val="4699E7"/>
+          </a:solidFill>
+          <a:ln>
+            <a:noFill/>
+          </a:ln>
+        </p:spPr>
+        <p:style>
+          <a:lnRef idx="1">
+            <a:schemeClr val="accent1"/>
+          </a:lnRef>
+          <a:fillRef idx="3">
+            <a:schemeClr val="accent1"/>
+          </a:fillRef>
+          <a:effectRef idx="2">
+            <a:schemeClr val="accent1"/>
+          </a:effectRef>
+          <a:fontRef idx="minor">
+            <a:schemeClr val="lt1"/>
+          </a:fontRef>
+        </p:style>
+        <p:txBody>
+          <a:bodyPr rtlCol="0" anchor="ctr"/>
+          <a:lstStyle/>
+          <a:p>
+            <a:pPr algn="ctr"/>
+          </a:p>
+        </p:txBody>
+      </p:sp>
+      <p:sp>
+        <p:nvSpPr>
+          <p:cNvPr id="37" name="Oval 36"/>
+          <p:cNvSpPr/>
+          <p:nvPr/>
+        </p:nvSpPr>
+        <p:spPr>
+          <a:xfrm>
+            <a:off x="2621214" y="4960620"/>
+            <a:ext cx="670543" cy="670560"/>
+          </a:xfrm>
+          <a:prstGeom prst="ellipse">
+            <a:avLst/>
+          </a:prstGeom>
+          <a:solidFill>
+            <a:srgbClr val="FFFFFF"/>
+          </a:solidFill>
+          <a:ln w="38100">
+            <a:solidFill>
+              <a:srgbClr val="4699E7"/>
+            </a:solidFill>
+          </a:ln>
+        </p:spPr>
+        <p:style>
+          <a:lnRef idx="1">
+            <a:schemeClr val="accent1"/>
+          </a:lnRef>
+          <a:fillRef idx="3">
+            <a:schemeClr val="accent1"/>
+          </a:fillRef>
+          <a:effectRef idx="2">
+            <a:schemeClr val="accent1"/>
+          </a:effectRef>
+          <a:fontRef idx="minor">
+            <a:schemeClr val="lt1"/>
+          </a:fontRef>
+        </p:style>
+        <p:txBody>
+          <a:bodyPr rtlCol="0" anchor="ctr"/>
+          <a:lstStyle/>
+          <a:p>
+            <a:pPr algn="ctr"/>
+          </a:p>
+        </p:txBody>
+      </p:sp>
+      <p:pic>
+        <p:nvPicPr>
+          <p:cNvPr id="38" name="Picture 37" descr="tmpn_xo4r3s.png"/>
+          <p:cNvPicPr>
+            <a:picLocks noChangeAspect="1"/>
+          </p:cNvPicPr>
+          <p:nvPr/>
+        </p:nvPicPr>
+        <p:blipFill>
+          <a:blip r:embed="rId8"/>
+          <a:stretch>
+            <a:fillRect/>
+          </a:stretch>
+        </p:blipFill>
+        <p:spPr>
+          <a:xfrm>
+            <a:off x="2768734" y="5108143"/>
+            <a:ext cx="375504" cy="375514"/>
+          </a:xfrm>
+          <a:prstGeom prst="rect">
+            <a:avLst/>
+          </a:prstGeom>
+        </p:spPr>
+      </p:pic>
+      <p:sp>
+        <p:nvSpPr>
+          <p:cNvPr id="39" name="TextBox 38"/>
+          <p:cNvSpPr txBox="1"/>
+          <p:nvPr/>
+        </p:nvSpPr>
+        <p:spPr>
+          <a:xfrm>
+            <a:off x="411470" y="5013960"/>
+            <a:ext cx="2042109" cy="213360"/>
+          </a:xfrm>
+          <a:prstGeom prst="rect">
+            <a:avLst/>
+          </a:prstGeom>
+          <a:noFill/>
+        </p:spPr>
+        <p:txBody>
+          <a:bodyPr wrap="square" lIns="0" rIns="0" tIns="0" bIns="0" anchor="ctr">
+            <a:noAutofit/>
+          </a:bodyPr>
+          <a:lstStyle/>
+          <a:p>
+            <a:pPr algn="r">
+              <a:lnSpc>
+                <a:spcPct val="100000"/>
+              </a:lnSpc>
+              <a:spcBef>
+                <a:spcPts val="0"/>
+              </a:spcBef>
+              <a:spcAft>
+                <a:spcPts val="0"/>
+              </a:spcAft>
+              <a:defRPr sz="1250" b="1" i="0">
+                <a:solidFill>
+                  <a:srgbClr val="1A1A1A"/>
+                </a:solidFill>
+                <a:latin typeface="Arial"/>
+              </a:defRPr>
+            </a:pPr>
+            <a:r>
+              <a:t>Customer Focus</a:t>
+            </a:r>
+          </a:p>
+        </p:txBody>
+      </p:sp>
+      <p:sp>
+        <p:nvSpPr>
+          <p:cNvPr id="40" name="TextBox 39"/>
+          <p:cNvSpPr txBox="1"/>
+          <p:nvPr/>
+        </p:nvSpPr>
+        <p:spPr>
+          <a:xfrm>
+            <a:off x="411470" y="5257800"/>
+            <a:ext cx="2042109" cy="320040"/>
+          </a:xfrm>
+          <a:prstGeom prst="rect">
+            <a:avLst/>
+          </a:prstGeom>
+          <a:noFill/>
+        </p:spPr>
+        <p:txBody>
+          <a:bodyPr wrap="square" lIns="0" rIns="0" tIns="0" bIns="0" anchor="t">
+            <a:noAutofit/>
+          </a:bodyPr>
+          <a:lstStyle/>
+          <a:p>
+            <a:pPr algn="r">
+              <a:lnSpc>
+                <a:spcPct val="100000"/>
+              </a:lnSpc>
+              <a:spcBef>
+                <a:spcPts val="0"/>
+              </a:spcBef>
+              <a:spcAft>
+                <a:spcPts val="0"/>
+              </a:spcAft>
+              <a:defRPr sz="950" b="0" i="0">
+                <a:solidFill>
+                  <a:srgbClr val="1A1A1A"/>
+                </a:solidFill>
+                <a:latin typeface="Arial"/>
+              </a:defRPr>
+            </a:pPr>
+            <a:r>
+              <a:t>The team's primary goal is to deliver value to the customer.</a:t>
+            </a:r>
+          </a:p>
+        </p:txBody>
+      </p:sp>
+      <p:sp>
+        <p:nvSpPr>
+          <p:cNvPr id="41" name="Rounded Rectangle 40"/>
+          <p:cNvSpPr/>
+          <p:nvPr/>
+        </p:nvSpPr>
+        <p:spPr>
+          <a:xfrm>
+            <a:off x="259074" y="2948940"/>
+            <a:ext cx="3276518" cy="1051560"/>
+          </a:xfrm>
+          <a:prstGeom prst="roundRect">
+            <a:avLst/>
+          </a:prstGeom>
+          <a:solidFill>
+            <a:srgbClr val="DFE3E8"/>
+          </a:solidFill>
+          <a:ln>
+            <a:noFill/>
+          </a:ln>
+        </p:spPr>
+        <p:style>
+          <a:lnRef idx="1">
+            <a:schemeClr val="accent1"/>
+          </a:lnRef>
+          <a:fillRef idx="3">
+            <a:schemeClr val="accent1"/>
+          </a:fillRef>
+          <a:effectRef idx="2">
+            <a:schemeClr val="accent1"/>
+          </a:effectRef>
+          <a:fontRef idx="minor">
+            <a:schemeClr val="lt1"/>
+          </a:fontRef>
+        </p:style>
+        <p:txBody>
+          <a:bodyPr rtlCol="0" anchor="ctr"/>
+          <a:lstStyle/>
+          <a:p>
+            <a:pPr algn="ctr"/>
+          </a:p>
+        </p:txBody>
+      </p:sp>
+      <p:sp>
+        <p:nvSpPr>
+          <p:cNvPr id="42" name="Rounded Rectangle 41"/>
+          <p:cNvSpPr/>
+          <p:nvPr/>
+        </p:nvSpPr>
+        <p:spPr>
+          <a:xfrm>
+            <a:off x="228594" y="2903220"/>
+            <a:ext cx="3276518" cy="1051560"/>
+          </a:xfrm>
+          <a:prstGeom prst="roundRect">
+            <a:avLst/>
+          </a:prstGeom>
+          <a:solidFill>
+            <a:srgbClr val="FBFBFC"/>
+          </a:solidFill>
+          <a:ln w="12700">
+            <a:solidFill>
+              <a:srgbClr val="E2E6EA"/>
+            </a:solidFill>
+          </a:ln>
+        </p:spPr>
+        <p:style>
+          <a:lnRef idx="1">
+            <a:schemeClr val="accent1"/>
+          </a:lnRef>
+          <a:fillRef idx="3">
+            <a:schemeClr val="accent1"/>
+          </a:fillRef>
+          <a:effectRef idx="2">
+            <a:schemeClr val="accent1"/>
+          </a:effectRef>
+          <a:fontRef idx="minor">
+            <a:schemeClr val="lt1"/>
+          </a:fontRef>
+        </p:style>
+        <p:txBody>
+          <a:bodyPr rtlCol="0" anchor="ctr"/>
+          <a:lstStyle/>
+          <a:p>
+            <a:pPr algn="ctr"/>
+          </a:p>
+        </p:txBody>
+      </p:sp>
+      <p:sp>
+        <p:nvSpPr>
+          <p:cNvPr id="43" name="Rounded Rectangle 42"/>
+          <p:cNvSpPr/>
+          <p:nvPr/>
+        </p:nvSpPr>
+        <p:spPr>
+          <a:xfrm>
+            <a:off x="3436534" y="2903220"/>
+            <a:ext cx="68578" cy="1051560"/>
+          </a:xfrm>
+          <a:prstGeom prst="roundRect">
+            <a:avLst/>
+          </a:prstGeom>
+          <a:solidFill>
+            <a:srgbClr val="15B7CF"/>
+          </a:solidFill>
+          <a:ln>
+            <a:noFill/>
+          </a:ln>
+        </p:spPr>
+        <p:style>
+          <a:lnRef idx="1">
+            <a:schemeClr val="accent1"/>
+          </a:lnRef>
+          <a:fillRef idx="3">
+            <a:schemeClr val="accent1"/>
+          </a:fillRef>
+          <a:effectRef idx="2">
+            <a:schemeClr val="accent1"/>
+          </a:effectRef>
+          <a:fontRef idx="minor">
+            <a:schemeClr val="lt1"/>
+          </a:fontRef>
+        </p:style>
+        <p:txBody>
+          <a:bodyPr rtlCol="0" anchor="ctr"/>
+          <a:lstStyle/>
+          <a:p>
+            <a:pPr algn="ctr"/>
+          </a:p>
+        </p:txBody>
+      </p:sp>
+      <p:sp>
+        <p:nvSpPr>
+          <p:cNvPr id="44" name="Oval 43"/>
+          <p:cNvSpPr/>
+          <p:nvPr/>
+        </p:nvSpPr>
+        <p:spPr>
+          <a:xfrm>
+            <a:off x="2621214" y="3093720"/>
+            <a:ext cx="670543" cy="670560"/>
+          </a:xfrm>
+          <a:prstGeom prst="ellipse">
+            <a:avLst/>
+          </a:prstGeom>
+          <a:solidFill>
+            <a:srgbClr val="FFFFFF"/>
+          </a:solidFill>
+          <a:ln w="38100">
+            <a:solidFill>
+              <a:srgbClr val="15B7CF"/>
+            </a:solidFill>
+          </a:ln>
+        </p:spPr>
+        <p:style>
+          <a:lnRef idx="1">
+            <a:schemeClr val="accent1"/>
+          </a:lnRef>
+          <a:fillRef idx="3">
+            <a:schemeClr val="accent1"/>
+          </a:fillRef>
+          <a:effectRef idx="2">
+            <a:schemeClr val="accent1"/>
+          </a:effectRef>
+          <a:fontRef idx="minor">
+            <a:schemeClr val="lt1"/>
+          </a:fontRef>
+        </p:style>
+        <p:txBody>
+          <a:bodyPr rtlCol="0" anchor="ctr"/>
+          <a:lstStyle/>
+          <a:p>
+            <a:pPr algn="ctr"/>
+          </a:p>
+        </p:txBody>
+      </p:sp>
+      <p:pic>
+        <p:nvPicPr>
+          <p:cNvPr id="45" name="Picture 44" descr="tmp4d_0yk3v.png"/>
+          <p:cNvPicPr>
+            <a:picLocks noChangeAspect="1"/>
+          </p:cNvPicPr>
+          <p:nvPr/>
+        </p:nvPicPr>
+        <p:blipFill>
+          <a:blip r:embed="rId9"/>
+          <a:stretch>
+            <a:fillRect/>
+          </a:stretch>
+        </p:blipFill>
+        <p:spPr>
+          <a:xfrm>
+            <a:off x="2768734" y="3241243"/>
+            <a:ext cx="375504" cy="375514"/>
+          </a:xfrm>
+          <a:prstGeom prst="rect">
+            <a:avLst/>
+          </a:prstGeom>
+        </p:spPr>
+      </p:pic>
+      <p:sp>
+        <p:nvSpPr>
+          <p:cNvPr id="46" name="TextBox 45"/>
+          <p:cNvSpPr txBox="1"/>
+          <p:nvPr/>
+        </p:nvSpPr>
+        <p:spPr>
+          <a:xfrm>
+            <a:off x="411470" y="3147060"/>
+            <a:ext cx="2042109" cy="213360"/>
+          </a:xfrm>
+          <a:prstGeom prst="rect">
+            <a:avLst/>
+          </a:prstGeom>
+          <a:noFill/>
+        </p:spPr>
+        <p:txBody>
+          <a:bodyPr wrap="square" lIns="0" rIns="0" tIns="0" bIns="0" anchor="ctr">
+            <a:noAutofit/>
+          </a:bodyPr>
+          <a:lstStyle/>
+          <a:p>
+            <a:pPr algn="r">
+              <a:lnSpc>
+                <a:spcPct val="100000"/>
+              </a:lnSpc>
+              <a:spcBef>
+                <a:spcPts val="0"/>
+              </a:spcBef>
+              <a:spcAft>
+                <a:spcPts val="0"/>
+              </a:spcAft>
+              <a:defRPr sz="1250" b="1" i="0">
+                <a:solidFill>
+                  <a:srgbClr val="1A1A1A"/>
+                </a:solidFill>
+                <a:latin typeface="Arial"/>
+              </a:defRPr>
+            </a:pPr>
+            <a:r>
+              <a:t>Iterative Delivery</a:t>
+            </a:r>
+          </a:p>
+        </p:txBody>
+      </p:sp>
+      <p:sp>
+        <p:nvSpPr>
+          <p:cNvPr id="47" name="TextBox 46"/>
+          <p:cNvSpPr txBox="1"/>
+          <p:nvPr/>
+        </p:nvSpPr>
+        <p:spPr>
+          <a:xfrm>
+            <a:off x="411470" y="3390900"/>
+            <a:ext cx="2042109" cy="320040"/>
+          </a:xfrm>
+          <a:prstGeom prst="rect">
+            <a:avLst/>
+          </a:prstGeom>
+          <a:noFill/>
+        </p:spPr>
+        <p:txBody>
+          <a:bodyPr wrap="square" lIns="0" rIns="0" tIns="0" bIns="0" anchor="t">
+            <a:noAutofit/>
+          </a:bodyPr>
+          <a:lstStyle/>
+          <a:p>
+            <a:pPr algn="r">
+              <a:lnSpc>
+                <a:spcPct val="100000"/>
+              </a:lnSpc>
+              <a:spcBef>
+                <a:spcPts val="0"/>
+              </a:spcBef>
+              <a:spcAft>
+                <a:spcPts val="0"/>
+              </a:spcAft>
+              <a:defRPr sz="950" b="0" i="0">
+                <a:solidFill>
+                  <a:srgbClr val="1A1A1A"/>
+                </a:solidFill>
+                <a:latin typeface="Arial"/>
+              </a:defRPr>
+            </a:pPr>
+            <a:r>
+              <a:t>Projects are broken into small, manageable cycles.</a:t>
             </a:r>
           </a:p>
         </p:txBody>
